--- a/Syllabus Presentation.pptx
+++ b/Syllabus Presentation.pptx
@@ -275,7 +275,7 @@
           <a:p>
             <a:fld id="{9C428281-856C-486C-AC17-7C6E477362C5}" type="datetimeFigureOut">
               <a:rPr lang="en-US" smtClean="0"/>
-              <a:t>1/15/2026</a:t>
+              <a:t>8/21/2026</a:t>
             </a:fld>
             <a:endParaRPr lang="en-US"/>
           </a:p>
@@ -473,7 +473,7 @@
           <a:p>
             <a:fld id="{9C428281-856C-486C-AC17-7C6E477362C5}" type="datetimeFigureOut">
               <a:rPr lang="en-US" smtClean="0"/>
-              <a:t>1/15/2026</a:t>
+              <a:t>8/21/2026</a:t>
             </a:fld>
             <a:endParaRPr lang="en-US"/>
           </a:p>
@@ -681,7 +681,7 @@
           <a:p>
             <a:fld id="{9C428281-856C-486C-AC17-7C6E477362C5}" type="datetimeFigureOut">
               <a:rPr lang="en-US" smtClean="0"/>
-              <a:t>1/15/2026</a:t>
+              <a:t>8/21/2026</a:t>
             </a:fld>
             <a:endParaRPr lang="en-US"/>
           </a:p>
@@ -879,7 +879,7 @@
           <a:p>
             <a:fld id="{9C428281-856C-486C-AC17-7C6E477362C5}" type="datetimeFigureOut">
               <a:rPr lang="en-US" smtClean="0"/>
-              <a:t>1/15/2026</a:t>
+              <a:t>8/21/2026</a:t>
             </a:fld>
             <a:endParaRPr lang="en-US"/>
           </a:p>
@@ -1154,7 +1154,7 @@
           <a:p>
             <a:fld id="{9C428281-856C-486C-AC17-7C6E477362C5}" type="datetimeFigureOut">
               <a:rPr lang="en-US" smtClean="0"/>
-              <a:t>1/15/2026</a:t>
+              <a:t>8/21/2026</a:t>
             </a:fld>
             <a:endParaRPr lang="en-US"/>
           </a:p>
@@ -1419,7 +1419,7 @@
           <a:p>
             <a:fld id="{9C428281-856C-486C-AC17-7C6E477362C5}" type="datetimeFigureOut">
               <a:rPr lang="en-US" smtClean="0"/>
-              <a:t>1/15/2026</a:t>
+              <a:t>8/21/2026</a:t>
             </a:fld>
             <a:endParaRPr lang="en-US"/>
           </a:p>
@@ -1831,7 +1831,7 @@
           <a:p>
             <a:fld id="{9C428281-856C-486C-AC17-7C6E477362C5}" type="datetimeFigureOut">
               <a:rPr lang="en-US" smtClean="0"/>
-              <a:t>1/15/2026</a:t>
+              <a:t>8/21/2026</a:t>
             </a:fld>
             <a:endParaRPr lang="en-US"/>
           </a:p>
@@ -1972,7 +1972,7 @@
           <a:p>
             <a:fld id="{9C428281-856C-486C-AC17-7C6E477362C5}" type="datetimeFigureOut">
               <a:rPr lang="en-US" smtClean="0"/>
-              <a:t>1/15/2026</a:t>
+              <a:t>8/21/2026</a:t>
             </a:fld>
             <a:endParaRPr lang="en-US"/>
           </a:p>
@@ -2085,7 +2085,7 @@
           <a:p>
             <a:fld id="{9C428281-856C-486C-AC17-7C6E477362C5}" type="datetimeFigureOut">
               <a:rPr lang="en-US" smtClean="0"/>
-              <a:t>1/15/2026</a:t>
+              <a:t>8/21/2026</a:t>
             </a:fld>
             <a:endParaRPr lang="en-US"/>
           </a:p>
@@ -2396,7 +2396,7 @@
           <a:p>
             <a:fld id="{9C428281-856C-486C-AC17-7C6E477362C5}" type="datetimeFigureOut">
               <a:rPr lang="en-US" smtClean="0"/>
-              <a:t>1/15/2026</a:t>
+              <a:t>8/21/2026</a:t>
             </a:fld>
             <a:endParaRPr lang="en-US"/>
           </a:p>
@@ -2684,7 +2684,7 @@
           <a:p>
             <a:fld id="{9C428281-856C-486C-AC17-7C6E477362C5}" type="datetimeFigureOut">
               <a:rPr lang="en-US" smtClean="0"/>
-              <a:t>1/15/2026</a:t>
+              <a:t>8/21/2026</a:t>
             </a:fld>
             <a:endParaRPr lang="en-US"/>
           </a:p>
@@ -2925,7 +2925,7 @@
           <a:p>
             <a:fld id="{9C428281-856C-486C-AC17-7C6E477362C5}" type="datetimeFigureOut">
               <a:rPr lang="en-US" smtClean="0"/>
-              <a:t>1/15/2026</a:t>
+              <a:t>8/21/2026</a:t>
             </a:fld>
             <a:endParaRPr lang="en-US"/>
           </a:p>
@@ -4275,7 +4275,7 @@
           <a:p>
             <a:r>
               <a:rPr lang="en-US" dirty="0"/>
-              <a:t>Announcements</a:t>
+              <a:t>Welcome!</a:t>
             </a:r>
           </a:p>
         </p:txBody>
@@ -4324,22 +4324,22 @@
             <a:pPr lvl="1"/>
             <a:r>
               <a:rPr lang="en-US" dirty="0"/>
-              <a:t>Homework #1 will be assigned next Tuesday, and due a week later</a:t>
+              <a:t>Homework #1 will be assigned this Thursday, and due a week later</a:t>
             </a:r>
           </a:p>
           <a:p>
             <a:pPr lvl="1"/>
             <a:r>
               <a:rPr lang="en-US" dirty="0"/>
-              <a:t>Program #1 will be assigned on Jan 27</a:t>
+              <a:t>Program #1 will be assigned on Sept 3</a:t>
             </a:r>
             <a:r>
               <a:rPr lang="en-US" baseline="30000" dirty="0"/>
-              <a:t>th</a:t>
-            </a:r>
-            <a:r>
-              <a:rPr lang="en-US" dirty="0"/>
-              <a:t> and due February 9</a:t>
+              <a:t>rd</a:t>
+            </a:r>
+            <a:r>
+              <a:rPr lang="en-US" dirty="0"/>
+              <a:t> and due Sept 17</a:t>
             </a:r>
             <a:r>
               <a:rPr lang="en-US" baseline="30000" dirty="0"/>
@@ -4467,19 +4467,22 @@
           <a:p>
             <a:r>
               <a:rPr lang="en-US" dirty="0"/>
-              <a:t>Meets: 3:30-4:45pm Tuesdays and Thursdays</a:t>
-            </a:r>
-          </a:p>
-          <a:p>
-            <a:r>
-              <a:rPr lang="en-US" dirty="0"/>
-              <a:t>Room: </a:t>
+              <a:t>Meets: 2:00-3:15pm Tuesdays and Thursdays</a:t>
+            </a:r>
+          </a:p>
+          <a:p>
+            <a:r>
+              <a:rPr lang="en-US" dirty="0"/>
+              <a:t>Room: The Commons</a:t>
             </a:r>
             <a:r>
               <a:rPr lang="x-none" dirty="0"/>
-              <a:t>M Pacheco ILC, Rm 140</a:t>
-            </a:r>
-            <a:endParaRPr lang="en-US" dirty="0"/>
+              <a:t>, Rm </a:t>
+            </a:r>
+            <a:r>
+              <a:rPr lang="en-US" dirty="0"/>
+              <a:t>305</a:t>
+            </a:r>
           </a:p>
           <a:p>
             <a:r>
@@ -4521,7 +4524,7 @@
           <a:p>
             <a:r>
               <a:rPr lang="en-US" b="1" dirty="0"/>
-              <a:t>Final Exam: 5/13/26, 3:30pm-5:30pm</a:t>
+              <a:t>Final Exam: 12/14/26, 3:30pm-5:30pm</a:t>
             </a:r>
             <a:r>
               <a:rPr lang="en-US" dirty="0"/>
@@ -4636,13 +4639,29 @@
             </a:r>
             <a:r>
               <a:rPr lang="en-US" dirty="0"/>
-              <a:t> Uddin</a:t>
-            </a:r>
-          </a:p>
-          <a:p>
-            <a:r>
-              <a:rPr lang="en-US" dirty="0"/>
-              <a:t>UGTAs: TBA… hopefully soon!</a:t>
+              <a:t> Uddin and </a:t>
+            </a:r>
+            <a:r>
+              <a:rPr lang="en-US" dirty="0" err="1"/>
+              <a:t>Xuecheng</a:t>
+            </a:r>
+            <a:r>
+              <a:rPr lang="en-US" dirty="0"/>
+              <a:t> Wang</a:t>
+            </a:r>
+          </a:p>
+          <a:p>
+            <a:r>
+              <a:rPr lang="en-US" dirty="0"/>
+              <a:t>UGTAs: </a:t>
+            </a:r>
+            <a:r>
+              <a:rPr lang="en-US" dirty="0" err="1"/>
+              <a:t>Akhond</a:t>
+            </a:r>
+            <a:r>
+              <a:rPr lang="en-US" dirty="0"/>
+              <a:t> Masud</a:t>
             </a:r>
           </a:p>
         </p:txBody>
@@ -4734,7 +4753,7 @@
               <a:rPr lang="x-none" u="sng" dirty="0">
                 <a:hlinkClick r:id="rId2"/>
               </a:rPr>
-              <a:t>https://d2l.arizona.edu/d2l/home/1725364</a:t>
+              <a:t>https://d2l.arizona.edu/d2l/home/1811180</a:t>
             </a:r>
             <a:endParaRPr lang="en-US" dirty="0"/>
           </a:p>
@@ -4747,7 +4766,7 @@
               <a:rPr lang="x-none" u="sng" dirty="0">
                 <a:hlinkClick r:id="rId3"/>
               </a:rPr>
-              <a:t>https://www.gradescope.com/courses/1221227</a:t>
+              <a:t>https://www.gradescope.com/courses/1357089</a:t>
             </a:r>
             <a:endParaRPr lang="en-US" dirty="0"/>
           </a:p>
@@ -4773,14 +4792,18 @@
               <a:rPr lang="x-none" u="sng" dirty="0">
                 <a:hlinkClick r:id="rId5"/>
               </a:rPr>
-              <a:t>https://piazza.com/arizona/spring2026/csc345/home</a:t>
-            </a:r>
-            <a:endParaRPr lang="en-US" dirty="0"/>
-          </a:p>
-          <a:p>
-            <a:r>
-              <a:rPr lang="en-US" dirty="0"/>
-              <a:t>Note that the website is a work in progress! It’ll have the assignments posted to it as they are released.</a:t>
+              <a:t>https://piazza.com/arizona/fall2026/csc345001</a:t>
+            </a:r>
+            <a:endParaRPr lang="en-US"/>
+          </a:p>
+          <a:p>
+            <a:r>
+              <a:rPr lang="en-US"/>
+              <a:t>Note </a:t>
+            </a:r>
+            <a:r>
+              <a:rPr lang="en-US" dirty="0"/>
+              <a:t>that the website is a work in progress! It’ll have the assignments posted to it as they are released.</a:t>
             </a:r>
           </a:p>
           <a:p>
@@ -4796,7 +4819,7 @@
             </a:r>
             <a:r>
               <a:rPr lang="en-US" dirty="0"/>
-              <a:t> 823): Tuesday and Thursday 2:00pm-3:00pm</a:t>
+              <a:t> 823): Tuesday and Thursday 1:00pm-1:50pm</a:t>
             </a:r>
           </a:p>
         </p:txBody>
@@ -4889,22 +4912,7 @@
             <a:pPr lvl="1"/>
             <a:r>
               <a:rPr lang="en-US" dirty="0"/>
-              <a:t>March 3</a:t>
-            </a:r>
-            <a:r>
-              <a:rPr lang="en-US" baseline="30000" dirty="0"/>
-              <a:t>rd</a:t>
-            </a:r>
-            <a:r>
-              <a:rPr lang="en-US" dirty="0"/>
-              <a:t> </a:t>
-            </a:r>
-          </a:p>
-          <a:p>
-            <a:pPr lvl="1"/>
-            <a:r>
-              <a:rPr lang="en-US" dirty="0"/>
-              <a:t>April 16</a:t>
+              <a:t>Oct 8</a:t>
             </a:r>
             <a:r>
               <a:rPr lang="en-US" baseline="30000" dirty="0"/>
@@ -4916,64 +4924,30 @@
             </a:r>
           </a:p>
           <a:p>
-            <a:r>
-              <a:rPr lang="en-US" dirty="0"/>
-              <a:t>Final Exam May 13</a:t>
+            <a:pPr lvl="1"/>
+            <a:r>
+              <a:rPr lang="en-US" dirty="0"/>
+              <a:t>Nov 17</a:t>
             </a:r>
             <a:r>
               <a:rPr lang="en-US" baseline="30000" dirty="0"/>
               <a:t>th</a:t>
             </a:r>
-          </a:p>
-          <a:p>
-            <a:r>
-              <a:rPr lang="en-US" dirty="0"/>
-              <a:t>Spring break is March 9</a:t>
+            <a:r>
+              <a:rPr lang="en-US" dirty="0"/>
+              <a:t> </a:t>
+            </a:r>
+          </a:p>
+          <a:p>
+            <a:r>
+              <a:rPr lang="en-US" dirty="0"/>
+              <a:t>Final Exam Dec 14</a:t>
             </a:r>
             <a:r>
               <a:rPr lang="en-US" baseline="30000" dirty="0"/>
               <a:t>th</a:t>
             </a:r>
-            <a:r>
-              <a:rPr lang="en-US" dirty="0"/>
-              <a:t> to the 13</a:t>
-            </a:r>
-            <a:r>
-              <a:rPr lang="en-US" baseline="30000" dirty="0"/>
-              <a:t>th</a:t>
-            </a:r>
-            <a:r>
-              <a:rPr lang="en-US" dirty="0"/>
-              <a:t> </a:t>
-            </a:r>
-          </a:p>
-          <a:p>
-            <a:r>
-              <a:rPr lang="en-US" dirty="0"/>
-              <a:t>Jan 27</a:t>
-            </a:r>
-            <a:r>
-              <a:rPr lang="en-US" baseline="30000" dirty="0"/>
-              <a:t>th</a:t>
-            </a:r>
-            <a:r>
-              <a:rPr lang="en-US" dirty="0"/>
-              <a:t> is the last day you can withdraw from the course without a “W” grade</a:t>
-            </a:r>
-          </a:p>
-          <a:p>
-            <a:r>
-              <a:rPr lang="en-US" dirty="0"/>
-              <a:t>March 31</a:t>
-            </a:r>
-            <a:r>
-              <a:rPr lang="en-US" baseline="30000" dirty="0"/>
-              <a:t>st</a:t>
-            </a:r>
-            <a:r>
-              <a:rPr lang="en-US" dirty="0"/>
-              <a:t> is the last day you can withdraw from the course with a “W” grade</a:t>
-            </a:r>
+            <a:endParaRPr lang="en-US" dirty="0"/>
           </a:p>
         </p:txBody>
       </p:sp>
@@ -5072,7 +5046,7 @@
             </a:r>
             <a:r>
               <a:rPr lang="en-US" dirty="0"/>
-              <a:t>, worth 5% each, for a total of 20%</a:t>
+              <a:t>, worth 3.75% each, for a total of 15%</a:t>
             </a:r>
           </a:p>
           <a:p>
@@ -5202,17 +5176,33 @@
           <a:p>
             <a:r>
               <a:rPr lang="en-US" dirty="0"/>
-              <a:t>My expectation is that you attend class and participate, I don’t grade directly based on this because it’s reflected in all the other grading categories</a:t>
-            </a:r>
-          </a:p>
-          <a:p>
+              <a:t>My expectation is that you attend class and participate. 5% of your grade is </a:t>
+            </a:r>
             <a:r>
               <a:rPr lang="en-US" b="1" dirty="0"/>
-              <a:t>This is a tough course,</a:t>
-            </a:r>
-            <a:r>
-              <a:rPr lang="en-US" dirty="0"/>
-              <a:t> students who skip/don’t engage with class meetings are extremely unlikely to do well</a:t>
+              <a:t>directly</a:t>
+            </a:r>
+            <a:r>
+              <a:rPr lang="en-US" dirty="0"/>
+              <a:t> based on Class Attendance.</a:t>
+            </a:r>
+          </a:p>
+          <a:p>
+            <a:r>
+              <a:rPr lang="en-US" b="1" dirty="0"/>
+              <a:t>Indirectly… This is a tough course,</a:t>
+            </a:r>
+            <a:r>
+              <a:rPr lang="en-US" dirty="0"/>
+              <a:t> students who skip/don’t engage with class meetings are </a:t>
+            </a:r>
+            <a:r>
+              <a:rPr lang="en-US" b="1" dirty="0"/>
+              <a:t>extremely unlikely</a:t>
+            </a:r>
+            <a:r>
+              <a:rPr lang="en-US" dirty="0"/>
+              <a:t> to do well</a:t>
             </a:r>
           </a:p>
           <a:p>

--- a/Syllabus Presentation.pptx
+++ b/Syllabus Presentation.pptx
@@ -4794,16 +4794,12 @@
               </a:rPr>
               <a:t>https://piazza.com/arizona/fall2026/csc345001</a:t>
             </a:r>
-            <a:endParaRPr lang="en-US"/>
-          </a:p>
-          <a:p>
-            <a:r>
-              <a:rPr lang="en-US"/>
-              <a:t>Note </a:t>
-            </a:r>
-            <a:r>
-              <a:rPr lang="en-US" dirty="0"/>
-              <a:t>that the website is a work in progress! It’ll have the assignments posted to it as they are released.</a:t>
+            <a:endParaRPr lang="en-US" dirty="0"/>
+          </a:p>
+          <a:p>
+            <a:r>
+              <a:rPr lang="en-US" dirty="0"/>
+              <a:t>Note that the website is a work in progress! It’ll have the assignments posted to it as they are released.</a:t>
             </a:r>
           </a:p>
           <a:p>

--- a/Syllabus Presentation.pptx
+++ b/Syllabus Presentation.pptx
@@ -275,7 +275,7 @@
           <a:p>
             <a:fld id="{9C428281-856C-486C-AC17-7C6E477362C5}" type="datetimeFigureOut">
               <a:rPr lang="en-US" smtClean="0"/>
-              <a:t>8/21/2026</a:t>
+              <a:t>8/23/2026</a:t>
             </a:fld>
             <a:endParaRPr lang="en-US"/>
           </a:p>
@@ -473,7 +473,7 @@
           <a:p>
             <a:fld id="{9C428281-856C-486C-AC17-7C6E477362C5}" type="datetimeFigureOut">
               <a:rPr lang="en-US" smtClean="0"/>
-              <a:t>8/21/2026</a:t>
+              <a:t>8/23/2026</a:t>
             </a:fld>
             <a:endParaRPr lang="en-US"/>
           </a:p>
@@ -681,7 +681,7 @@
           <a:p>
             <a:fld id="{9C428281-856C-486C-AC17-7C6E477362C5}" type="datetimeFigureOut">
               <a:rPr lang="en-US" smtClean="0"/>
-              <a:t>8/21/2026</a:t>
+              <a:t>8/23/2026</a:t>
             </a:fld>
             <a:endParaRPr lang="en-US"/>
           </a:p>
@@ -879,7 +879,7 @@
           <a:p>
             <a:fld id="{9C428281-856C-486C-AC17-7C6E477362C5}" type="datetimeFigureOut">
               <a:rPr lang="en-US" smtClean="0"/>
-              <a:t>8/21/2026</a:t>
+              <a:t>8/23/2026</a:t>
             </a:fld>
             <a:endParaRPr lang="en-US"/>
           </a:p>
@@ -1154,7 +1154,7 @@
           <a:p>
             <a:fld id="{9C428281-856C-486C-AC17-7C6E477362C5}" type="datetimeFigureOut">
               <a:rPr lang="en-US" smtClean="0"/>
-              <a:t>8/21/2026</a:t>
+              <a:t>8/23/2026</a:t>
             </a:fld>
             <a:endParaRPr lang="en-US"/>
           </a:p>
@@ -1419,7 +1419,7 @@
           <a:p>
             <a:fld id="{9C428281-856C-486C-AC17-7C6E477362C5}" type="datetimeFigureOut">
               <a:rPr lang="en-US" smtClean="0"/>
-              <a:t>8/21/2026</a:t>
+              <a:t>8/23/2026</a:t>
             </a:fld>
             <a:endParaRPr lang="en-US"/>
           </a:p>
@@ -1831,7 +1831,7 @@
           <a:p>
             <a:fld id="{9C428281-856C-486C-AC17-7C6E477362C5}" type="datetimeFigureOut">
               <a:rPr lang="en-US" smtClean="0"/>
-              <a:t>8/21/2026</a:t>
+              <a:t>8/23/2026</a:t>
             </a:fld>
             <a:endParaRPr lang="en-US"/>
           </a:p>
@@ -1972,7 +1972,7 @@
           <a:p>
             <a:fld id="{9C428281-856C-486C-AC17-7C6E477362C5}" type="datetimeFigureOut">
               <a:rPr lang="en-US" smtClean="0"/>
-              <a:t>8/21/2026</a:t>
+              <a:t>8/23/2026</a:t>
             </a:fld>
             <a:endParaRPr lang="en-US"/>
           </a:p>
@@ -2085,7 +2085,7 @@
           <a:p>
             <a:fld id="{9C428281-856C-486C-AC17-7C6E477362C5}" type="datetimeFigureOut">
               <a:rPr lang="en-US" smtClean="0"/>
-              <a:t>8/21/2026</a:t>
+              <a:t>8/23/2026</a:t>
             </a:fld>
             <a:endParaRPr lang="en-US"/>
           </a:p>
@@ -2396,7 +2396,7 @@
           <a:p>
             <a:fld id="{9C428281-856C-486C-AC17-7C6E477362C5}" type="datetimeFigureOut">
               <a:rPr lang="en-US" smtClean="0"/>
-              <a:t>8/21/2026</a:t>
+              <a:t>8/23/2026</a:t>
             </a:fld>
             <a:endParaRPr lang="en-US"/>
           </a:p>
@@ -2684,7 +2684,7 @@
           <a:p>
             <a:fld id="{9C428281-856C-486C-AC17-7C6E477362C5}" type="datetimeFigureOut">
               <a:rPr lang="en-US" smtClean="0"/>
-              <a:t>8/21/2026</a:t>
+              <a:t>8/23/2026</a:t>
             </a:fld>
             <a:endParaRPr lang="en-US"/>
           </a:p>
@@ -2925,7 +2925,7 @@
           <a:p>
             <a:fld id="{9C428281-856C-486C-AC17-7C6E477362C5}" type="datetimeFigureOut">
               <a:rPr lang="en-US" smtClean="0"/>
-              <a:t>8/21/2026</a:t>
+              <a:t>8/23/2026</a:t>
             </a:fld>
             <a:endParaRPr lang="en-US"/>
           </a:p>
@@ -4815,7 +4815,7 @@
             </a:r>
             <a:r>
               <a:rPr lang="en-US" dirty="0"/>
-              <a:t> 823): Tuesday and Thursday 1:00pm-1:50pm</a:t>
+              <a:t> 823): Tuesday and Thursday 12:45pm-1:45pm</a:t>
             </a:r>
           </a:p>
         </p:txBody>

--- a/Syllabus Presentation.pptx
+++ b/Syllabus Presentation.pptx
@@ -3605,7 +3605,7 @@
           <a:p>
             <a:r>
               <a:rPr lang="en-US" dirty="0"/>
-              <a:t>Graded by the TAs, regrade requested accepted for a week after grades are released</a:t>
+              <a:t>Graded by the TAs, regrade requests accepted for a week after grades are released</a:t>
             </a:r>
           </a:p>
         </p:txBody>
@@ -3620,6 +3620,232 @@
   <p:clrMapOvr>
     <a:masterClrMapping/>
   </p:clrMapOvr>
+  <p:timing>
+    <p:tnLst>
+      <p:par>
+        <p:cTn id="1" dur="indefinite" restart="never" nodeType="tmRoot">
+          <p:childTnLst>
+            <p:seq concurrent="1" nextAc="seek">
+              <p:cTn id="2" dur="indefinite" nodeType="mainSeq">
+                <p:childTnLst>
+                  <p:par>
+                    <p:cTn id="3" fill="hold">
+                      <p:stCondLst>
+                        <p:cond delay="indefinite"/>
+                      </p:stCondLst>
+                      <p:childTnLst>
+                        <p:par>
+                          <p:cTn id="4" fill="hold">
+                            <p:stCondLst>
+                              <p:cond delay="0"/>
+                            </p:stCondLst>
+                            <p:childTnLst>
+                              <p:par>
+                                <p:cTn id="5" presetID="1" presetClass="entr" presetSubtype="0" fill="hold" nodeType="clickEffect">
+                                  <p:stCondLst>
+                                    <p:cond delay="0"/>
+                                  </p:stCondLst>
+                                  <p:childTnLst>
+                                    <p:set>
+                                      <p:cBhvr>
+                                        <p:cTn id="6" dur="1" fill="hold">
+                                          <p:stCondLst>
+                                            <p:cond delay="0"/>
+                                          </p:stCondLst>
+                                        </p:cTn>
+                                        <p:tgtEl>
+                                          <p:spTgt spid="3">
+                                            <p:txEl>
+                                              <p:pRg st="0" end="0"/>
+                                            </p:txEl>
+                                          </p:spTgt>
+                                        </p:tgtEl>
+                                        <p:attrNameLst>
+                                          <p:attrName>style.visibility</p:attrName>
+                                        </p:attrNameLst>
+                                      </p:cBhvr>
+                                      <p:to>
+                                        <p:strVal val="visible"/>
+                                      </p:to>
+                                    </p:set>
+                                  </p:childTnLst>
+                                </p:cTn>
+                              </p:par>
+                            </p:childTnLst>
+                          </p:cTn>
+                        </p:par>
+                      </p:childTnLst>
+                    </p:cTn>
+                  </p:par>
+                  <p:par>
+                    <p:cTn id="7" fill="hold">
+                      <p:stCondLst>
+                        <p:cond delay="indefinite"/>
+                      </p:stCondLst>
+                      <p:childTnLst>
+                        <p:par>
+                          <p:cTn id="8" fill="hold">
+                            <p:stCondLst>
+                              <p:cond delay="0"/>
+                            </p:stCondLst>
+                            <p:childTnLst>
+                              <p:par>
+                                <p:cTn id="9" presetID="1" presetClass="entr" presetSubtype="0" fill="hold" nodeType="clickEffect">
+                                  <p:stCondLst>
+                                    <p:cond delay="0"/>
+                                  </p:stCondLst>
+                                  <p:childTnLst>
+                                    <p:set>
+                                      <p:cBhvr>
+                                        <p:cTn id="10" dur="1" fill="hold">
+                                          <p:stCondLst>
+                                            <p:cond delay="0"/>
+                                          </p:stCondLst>
+                                        </p:cTn>
+                                        <p:tgtEl>
+                                          <p:spTgt spid="3">
+                                            <p:txEl>
+                                              <p:pRg st="1" end="1"/>
+                                            </p:txEl>
+                                          </p:spTgt>
+                                        </p:tgtEl>
+                                        <p:attrNameLst>
+                                          <p:attrName>style.visibility</p:attrName>
+                                        </p:attrNameLst>
+                                      </p:cBhvr>
+                                      <p:to>
+                                        <p:strVal val="visible"/>
+                                      </p:to>
+                                    </p:set>
+                                  </p:childTnLst>
+                                </p:cTn>
+                              </p:par>
+                            </p:childTnLst>
+                          </p:cTn>
+                        </p:par>
+                      </p:childTnLst>
+                    </p:cTn>
+                  </p:par>
+                  <p:par>
+                    <p:cTn id="11" fill="hold">
+                      <p:stCondLst>
+                        <p:cond delay="indefinite"/>
+                      </p:stCondLst>
+                      <p:childTnLst>
+                        <p:par>
+                          <p:cTn id="12" fill="hold">
+                            <p:stCondLst>
+                              <p:cond delay="0"/>
+                            </p:stCondLst>
+                            <p:childTnLst>
+                              <p:par>
+                                <p:cTn id="13" presetID="1" presetClass="entr" presetSubtype="0" fill="hold" nodeType="clickEffect">
+                                  <p:stCondLst>
+                                    <p:cond delay="0"/>
+                                  </p:stCondLst>
+                                  <p:childTnLst>
+                                    <p:set>
+                                      <p:cBhvr>
+                                        <p:cTn id="14" dur="1" fill="hold">
+                                          <p:stCondLst>
+                                            <p:cond delay="0"/>
+                                          </p:stCondLst>
+                                        </p:cTn>
+                                        <p:tgtEl>
+                                          <p:spTgt spid="3">
+                                            <p:txEl>
+                                              <p:pRg st="2" end="2"/>
+                                            </p:txEl>
+                                          </p:spTgt>
+                                        </p:tgtEl>
+                                        <p:attrNameLst>
+                                          <p:attrName>style.visibility</p:attrName>
+                                        </p:attrNameLst>
+                                      </p:cBhvr>
+                                      <p:to>
+                                        <p:strVal val="visible"/>
+                                      </p:to>
+                                    </p:set>
+                                  </p:childTnLst>
+                                </p:cTn>
+                              </p:par>
+                            </p:childTnLst>
+                          </p:cTn>
+                        </p:par>
+                      </p:childTnLst>
+                    </p:cTn>
+                  </p:par>
+                  <p:par>
+                    <p:cTn id="15" fill="hold">
+                      <p:stCondLst>
+                        <p:cond delay="indefinite"/>
+                      </p:stCondLst>
+                      <p:childTnLst>
+                        <p:par>
+                          <p:cTn id="16" fill="hold">
+                            <p:stCondLst>
+                              <p:cond delay="0"/>
+                            </p:stCondLst>
+                            <p:childTnLst>
+                              <p:par>
+                                <p:cTn id="17" presetID="1" presetClass="entr" presetSubtype="0" fill="hold" nodeType="clickEffect">
+                                  <p:stCondLst>
+                                    <p:cond delay="0"/>
+                                  </p:stCondLst>
+                                  <p:childTnLst>
+                                    <p:set>
+                                      <p:cBhvr>
+                                        <p:cTn id="18" dur="1" fill="hold">
+                                          <p:stCondLst>
+                                            <p:cond delay="0"/>
+                                          </p:stCondLst>
+                                        </p:cTn>
+                                        <p:tgtEl>
+                                          <p:spTgt spid="3">
+                                            <p:txEl>
+                                              <p:pRg st="3" end="3"/>
+                                            </p:txEl>
+                                          </p:spTgt>
+                                        </p:tgtEl>
+                                        <p:attrNameLst>
+                                          <p:attrName>style.visibility</p:attrName>
+                                        </p:attrNameLst>
+                                      </p:cBhvr>
+                                      <p:to>
+                                        <p:strVal val="visible"/>
+                                      </p:to>
+                                    </p:set>
+                                  </p:childTnLst>
+                                </p:cTn>
+                              </p:par>
+                            </p:childTnLst>
+                          </p:cTn>
+                        </p:par>
+                      </p:childTnLst>
+                    </p:cTn>
+                  </p:par>
+                </p:childTnLst>
+              </p:cTn>
+              <p:prevCondLst>
+                <p:cond evt="onPrev" delay="0">
+                  <p:tgtEl>
+                    <p:sldTgt/>
+                  </p:tgtEl>
+                </p:cond>
+              </p:prevCondLst>
+              <p:nextCondLst>
+                <p:cond evt="onNext" delay="0">
+                  <p:tgtEl>
+                    <p:sldTgt/>
+                  </p:tgtEl>
+                </p:cond>
+              </p:nextCondLst>
+            </p:seq>
+          </p:childTnLst>
+        </p:cTn>
+      </p:par>
+    </p:tnLst>
+  </p:timing>
 </p:sld>
 </file>
 
@@ -3743,6 +3969,330 @@
   <p:clrMapOvr>
     <a:masterClrMapping/>
   </p:clrMapOvr>
+  <p:timing>
+    <p:tnLst>
+      <p:par>
+        <p:cTn id="1" dur="indefinite" restart="never" nodeType="tmRoot">
+          <p:childTnLst>
+            <p:seq concurrent="1" nextAc="seek">
+              <p:cTn id="2" dur="indefinite" nodeType="mainSeq">
+                <p:childTnLst>
+                  <p:par>
+                    <p:cTn id="3" fill="hold">
+                      <p:stCondLst>
+                        <p:cond delay="indefinite"/>
+                      </p:stCondLst>
+                      <p:childTnLst>
+                        <p:par>
+                          <p:cTn id="4" fill="hold">
+                            <p:stCondLst>
+                              <p:cond delay="0"/>
+                            </p:stCondLst>
+                            <p:childTnLst>
+                              <p:par>
+                                <p:cTn id="5" presetID="1" presetClass="entr" presetSubtype="0" fill="hold" nodeType="clickEffect">
+                                  <p:stCondLst>
+                                    <p:cond delay="0"/>
+                                  </p:stCondLst>
+                                  <p:childTnLst>
+                                    <p:set>
+                                      <p:cBhvr>
+                                        <p:cTn id="6" dur="1" fill="hold">
+                                          <p:stCondLst>
+                                            <p:cond delay="0"/>
+                                          </p:stCondLst>
+                                        </p:cTn>
+                                        <p:tgtEl>
+                                          <p:spTgt spid="3">
+                                            <p:txEl>
+                                              <p:pRg st="0" end="0"/>
+                                            </p:txEl>
+                                          </p:spTgt>
+                                        </p:tgtEl>
+                                        <p:attrNameLst>
+                                          <p:attrName>style.visibility</p:attrName>
+                                        </p:attrNameLst>
+                                      </p:cBhvr>
+                                      <p:to>
+                                        <p:strVal val="visible"/>
+                                      </p:to>
+                                    </p:set>
+                                  </p:childTnLst>
+                                </p:cTn>
+                              </p:par>
+                            </p:childTnLst>
+                          </p:cTn>
+                        </p:par>
+                      </p:childTnLst>
+                    </p:cTn>
+                  </p:par>
+                  <p:par>
+                    <p:cTn id="7" fill="hold">
+                      <p:stCondLst>
+                        <p:cond delay="indefinite"/>
+                      </p:stCondLst>
+                      <p:childTnLst>
+                        <p:par>
+                          <p:cTn id="8" fill="hold">
+                            <p:stCondLst>
+                              <p:cond delay="0"/>
+                            </p:stCondLst>
+                            <p:childTnLst>
+                              <p:par>
+                                <p:cTn id="9" presetID="1" presetClass="entr" presetSubtype="0" fill="hold" nodeType="clickEffect">
+                                  <p:stCondLst>
+                                    <p:cond delay="0"/>
+                                  </p:stCondLst>
+                                  <p:childTnLst>
+                                    <p:set>
+                                      <p:cBhvr>
+                                        <p:cTn id="10" dur="1" fill="hold">
+                                          <p:stCondLst>
+                                            <p:cond delay="0"/>
+                                          </p:stCondLst>
+                                        </p:cTn>
+                                        <p:tgtEl>
+                                          <p:spTgt spid="3">
+                                            <p:txEl>
+                                              <p:pRg st="1" end="1"/>
+                                            </p:txEl>
+                                          </p:spTgt>
+                                        </p:tgtEl>
+                                        <p:attrNameLst>
+                                          <p:attrName>style.visibility</p:attrName>
+                                        </p:attrNameLst>
+                                      </p:cBhvr>
+                                      <p:to>
+                                        <p:strVal val="visible"/>
+                                      </p:to>
+                                    </p:set>
+                                  </p:childTnLst>
+                                </p:cTn>
+                              </p:par>
+                            </p:childTnLst>
+                          </p:cTn>
+                        </p:par>
+                      </p:childTnLst>
+                    </p:cTn>
+                  </p:par>
+                  <p:par>
+                    <p:cTn id="11" fill="hold">
+                      <p:stCondLst>
+                        <p:cond delay="indefinite"/>
+                      </p:stCondLst>
+                      <p:childTnLst>
+                        <p:par>
+                          <p:cTn id="12" fill="hold">
+                            <p:stCondLst>
+                              <p:cond delay="0"/>
+                            </p:stCondLst>
+                            <p:childTnLst>
+                              <p:par>
+                                <p:cTn id="13" presetID="1" presetClass="entr" presetSubtype="0" fill="hold" nodeType="clickEffect">
+                                  <p:stCondLst>
+                                    <p:cond delay="0"/>
+                                  </p:stCondLst>
+                                  <p:childTnLst>
+                                    <p:set>
+                                      <p:cBhvr>
+                                        <p:cTn id="14" dur="1" fill="hold">
+                                          <p:stCondLst>
+                                            <p:cond delay="0"/>
+                                          </p:stCondLst>
+                                        </p:cTn>
+                                        <p:tgtEl>
+                                          <p:spTgt spid="3">
+                                            <p:txEl>
+                                              <p:pRg st="2" end="2"/>
+                                            </p:txEl>
+                                          </p:spTgt>
+                                        </p:tgtEl>
+                                        <p:attrNameLst>
+                                          <p:attrName>style.visibility</p:attrName>
+                                        </p:attrNameLst>
+                                      </p:cBhvr>
+                                      <p:to>
+                                        <p:strVal val="visible"/>
+                                      </p:to>
+                                    </p:set>
+                                  </p:childTnLst>
+                                </p:cTn>
+                              </p:par>
+                            </p:childTnLst>
+                          </p:cTn>
+                        </p:par>
+                      </p:childTnLst>
+                    </p:cTn>
+                  </p:par>
+                  <p:par>
+                    <p:cTn id="15" fill="hold">
+                      <p:stCondLst>
+                        <p:cond delay="indefinite"/>
+                      </p:stCondLst>
+                      <p:childTnLst>
+                        <p:par>
+                          <p:cTn id="16" fill="hold">
+                            <p:stCondLst>
+                              <p:cond delay="0"/>
+                            </p:stCondLst>
+                            <p:childTnLst>
+                              <p:par>
+                                <p:cTn id="17" presetID="1" presetClass="entr" presetSubtype="0" fill="hold" nodeType="clickEffect">
+                                  <p:stCondLst>
+                                    <p:cond delay="0"/>
+                                  </p:stCondLst>
+                                  <p:childTnLst>
+                                    <p:set>
+                                      <p:cBhvr>
+                                        <p:cTn id="18" dur="1" fill="hold">
+                                          <p:stCondLst>
+                                            <p:cond delay="0"/>
+                                          </p:stCondLst>
+                                        </p:cTn>
+                                        <p:tgtEl>
+                                          <p:spTgt spid="3">
+                                            <p:txEl>
+                                              <p:pRg st="3" end="3"/>
+                                            </p:txEl>
+                                          </p:spTgt>
+                                        </p:tgtEl>
+                                        <p:attrNameLst>
+                                          <p:attrName>style.visibility</p:attrName>
+                                        </p:attrNameLst>
+                                      </p:cBhvr>
+                                      <p:to>
+                                        <p:strVal val="visible"/>
+                                      </p:to>
+                                    </p:set>
+                                  </p:childTnLst>
+                                </p:cTn>
+                              </p:par>
+                            </p:childTnLst>
+                          </p:cTn>
+                        </p:par>
+                      </p:childTnLst>
+                    </p:cTn>
+                  </p:par>
+                  <p:par>
+                    <p:cTn id="19" fill="hold">
+                      <p:stCondLst>
+                        <p:cond delay="indefinite"/>
+                      </p:stCondLst>
+                      <p:childTnLst>
+                        <p:par>
+                          <p:cTn id="20" fill="hold">
+                            <p:stCondLst>
+                              <p:cond delay="0"/>
+                            </p:stCondLst>
+                            <p:childTnLst>
+                              <p:par>
+                                <p:cTn id="21" presetID="1" presetClass="entr" presetSubtype="0" fill="hold" nodeType="clickEffect">
+                                  <p:stCondLst>
+                                    <p:cond delay="0"/>
+                                  </p:stCondLst>
+                                  <p:childTnLst>
+                                    <p:set>
+                                      <p:cBhvr>
+                                        <p:cTn id="22" dur="1" fill="hold">
+                                          <p:stCondLst>
+                                            <p:cond delay="0"/>
+                                          </p:stCondLst>
+                                        </p:cTn>
+                                        <p:tgtEl>
+                                          <p:spTgt spid="3">
+                                            <p:txEl>
+                                              <p:pRg st="4" end="4"/>
+                                            </p:txEl>
+                                          </p:spTgt>
+                                        </p:tgtEl>
+                                        <p:attrNameLst>
+                                          <p:attrName>style.visibility</p:attrName>
+                                        </p:attrNameLst>
+                                      </p:cBhvr>
+                                      <p:to>
+                                        <p:strVal val="visible"/>
+                                      </p:to>
+                                    </p:set>
+                                  </p:childTnLst>
+                                </p:cTn>
+                              </p:par>
+                            </p:childTnLst>
+                          </p:cTn>
+                        </p:par>
+                      </p:childTnLst>
+                    </p:cTn>
+                  </p:par>
+                  <p:par>
+                    <p:cTn id="23" fill="hold">
+                      <p:stCondLst>
+                        <p:cond delay="indefinite"/>
+                      </p:stCondLst>
+                      <p:childTnLst>
+                        <p:par>
+                          <p:cTn id="24" fill="hold">
+                            <p:stCondLst>
+                              <p:cond delay="0"/>
+                            </p:stCondLst>
+                            <p:childTnLst>
+                              <p:par>
+                                <p:cTn id="25" presetID="1" presetClass="entr" presetSubtype="0" fill="hold" nodeType="clickEffect">
+                                  <p:stCondLst>
+                                    <p:cond delay="0"/>
+                                  </p:stCondLst>
+                                  <p:childTnLst>
+                                    <p:set>
+                                      <p:cBhvr>
+                                        <p:cTn id="26" dur="1" fill="hold">
+                                          <p:stCondLst>
+                                            <p:cond delay="0"/>
+                                          </p:stCondLst>
+                                        </p:cTn>
+                                        <p:tgtEl>
+                                          <p:spTgt spid="3">
+                                            <p:txEl>
+                                              <p:pRg st="5" end="5"/>
+                                            </p:txEl>
+                                          </p:spTgt>
+                                        </p:tgtEl>
+                                        <p:attrNameLst>
+                                          <p:attrName>style.visibility</p:attrName>
+                                        </p:attrNameLst>
+                                      </p:cBhvr>
+                                      <p:to>
+                                        <p:strVal val="visible"/>
+                                      </p:to>
+                                    </p:set>
+                                  </p:childTnLst>
+                                </p:cTn>
+                              </p:par>
+                            </p:childTnLst>
+                          </p:cTn>
+                        </p:par>
+                      </p:childTnLst>
+                    </p:cTn>
+                  </p:par>
+                </p:childTnLst>
+              </p:cTn>
+              <p:prevCondLst>
+                <p:cond evt="onPrev" delay="0">
+                  <p:tgtEl>
+                    <p:sldTgt/>
+                  </p:tgtEl>
+                </p:cond>
+              </p:prevCondLst>
+              <p:nextCondLst>
+                <p:cond evt="onNext" delay="0">
+                  <p:tgtEl>
+                    <p:sldTgt/>
+                  </p:tgtEl>
+                </p:cond>
+              </p:nextCondLst>
+            </p:seq>
+          </p:childTnLst>
+        </p:cTn>
+      </p:par>
+    </p:tnLst>
+  </p:timing>
 </p:sld>
 </file>
 
@@ -4192,7 +4742,7 @@
           <a:p>
             <a:r>
               <a:rPr lang="en-US" dirty="0"/>
-              <a:t>I’ll see you next Tuesday!</a:t>
+              <a:t>I’ll see you Thursday!</a:t>
             </a:r>
           </a:p>
         </p:txBody>
@@ -4371,6 +4921,245 @@
   <p:clrMapOvr>
     <a:masterClrMapping/>
   </p:clrMapOvr>
+  <p:timing>
+    <p:tnLst>
+      <p:par>
+        <p:cTn id="1" dur="indefinite" restart="never" nodeType="tmRoot">
+          <p:childTnLst>
+            <p:seq concurrent="1" nextAc="seek">
+              <p:cTn id="2" dur="indefinite" nodeType="mainSeq">
+                <p:childTnLst>
+                  <p:par>
+                    <p:cTn id="3" fill="hold">
+                      <p:stCondLst>
+                        <p:cond delay="indefinite"/>
+                      </p:stCondLst>
+                      <p:childTnLst>
+                        <p:par>
+                          <p:cTn id="4" fill="hold">
+                            <p:stCondLst>
+                              <p:cond delay="0"/>
+                            </p:stCondLst>
+                            <p:childTnLst>
+                              <p:par>
+                                <p:cTn id="5" presetID="1" presetClass="entr" presetSubtype="0" fill="hold" nodeType="clickEffect">
+                                  <p:stCondLst>
+                                    <p:cond delay="0"/>
+                                  </p:stCondLst>
+                                  <p:childTnLst>
+                                    <p:set>
+                                      <p:cBhvr>
+                                        <p:cTn id="6" dur="1" fill="hold">
+                                          <p:stCondLst>
+                                            <p:cond delay="0"/>
+                                          </p:stCondLst>
+                                        </p:cTn>
+                                        <p:tgtEl>
+                                          <p:spTgt spid="3">
+                                            <p:txEl>
+                                              <p:pRg st="0" end="0"/>
+                                            </p:txEl>
+                                          </p:spTgt>
+                                        </p:tgtEl>
+                                        <p:attrNameLst>
+                                          <p:attrName>style.visibility</p:attrName>
+                                        </p:attrNameLst>
+                                      </p:cBhvr>
+                                      <p:to>
+                                        <p:strVal val="visible"/>
+                                      </p:to>
+                                    </p:set>
+                                  </p:childTnLst>
+                                </p:cTn>
+                              </p:par>
+                            </p:childTnLst>
+                          </p:cTn>
+                        </p:par>
+                      </p:childTnLst>
+                    </p:cTn>
+                  </p:par>
+                  <p:par>
+                    <p:cTn id="7" fill="hold">
+                      <p:stCondLst>
+                        <p:cond delay="indefinite"/>
+                      </p:stCondLst>
+                      <p:childTnLst>
+                        <p:par>
+                          <p:cTn id="8" fill="hold">
+                            <p:stCondLst>
+                              <p:cond delay="0"/>
+                            </p:stCondLst>
+                            <p:childTnLst>
+                              <p:par>
+                                <p:cTn id="9" presetID="1" presetClass="entr" presetSubtype="0" fill="hold" nodeType="clickEffect">
+                                  <p:stCondLst>
+                                    <p:cond delay="0"/>
+                                  </p:stCondLst>
+                                  <p:childTnLst>
+                                    <p:set>
+                                      <p:cBhvr>
+                                        <p:cTn id="10" dur="1" fill="hold">
+                                          <p:stCondLst>
+                                            <p:cond delay="0"/>
+                                          </p:stCondLst>
+                                        </p:cTn>
+                                        <p:tgtEl>
+                                          <p:spTgt spid="3">
+                                            <p:txEl>
+                                              <p:pRg st="1" end="1"/>
+                                            </p:txEl>
+                                          </p:spTgt>
+                                        </p:tgtEl>
+                                        <p:attrNameLst>
+                                          <p:attrName>style.visibility</p:attrName>
+                                        </p:attrNameLst>
+                                      </p:cBhvr>
+                                      <p:to>
+                                        <p:strVal val="visible"/>
+                                      </p:to>
+                                    </p:set>
+                                  </p:childTnLst>
+                                </p:cTn>
+                              </p:par>
+                              <p:par>
+                                <p:cTn id="11" presetID="1" presetClass="entr" presetSubtype="0" fill="hold" nodeType="withEffect">
+                                  <p:stCondLst>
+                                    <p:cond delay="0"/>
+                                  </p:stCondLst>
+                                  <p:childTnLst>
+                                    <p:set>
+                                      <p:cBhvr>
+                                        <p:cTn id="12" dur="1" fill="hold">
+                                          <p:stCondLst>
+                                            <p:cond delay="0"/>
+                                          </p:stCondLst>
+                                        </p:cTn>
+                                        <p:tgtEl>
+                                          <p:spTgt spid="3">
+                                            <p:txEl>
+                                              <p:pRg st="2" end="2"/>
+                                            </p:txEl>
+                                          </p:spTgt>
+                                        </p:tgtEl>
+                                        <p:attrNameLst>
+                                          <p:attrName>style.visibility</p:attrName>
+                                        </p:attrNameLst>
+                                      </p:cBhvr>
+                                      <p:to>
+                                        <p:strVal val="visible"/>
+                                      </p:to>
+                                    </p:set>
+                                  </p:childTnLst>
+                                </p:cTn>
+                              </p:par>
+                              <p:par>
+                                <p:cTn id="13" presetID="1" presetClass="entr" presetSubtype="0" fill="hold" nodeType="withEffect">
+                                  <p:stCondLst>
+                                    <p:cond delay="0"/>
+                                  </p:stCondLst>
+                                  <p:childTnLst>
+                                    <p:set>
+                                      <p:cBhvr>
+                                        <p:cTn id="14" dur="1" fill="hold">
+                                          <p:stCondLst>
+                                            <p:cond delay="0"/>
+                                          </p:stCondLst>
+                                        </p:cTn>
+                                        <p:tgtEl>
+                                          <p:spTgt spid="3">
+                                            <p:txEl>
+                                              <p:pRg st="3" end="3"/>
+                                            </p:txEl>
+                                          </p:spTgt>
+                                        </p:tgtEl>
+                                        <p:attrNameLst>
+                                          <p:attrName>style.visibility</p:attrName>
+                                        </p:attrNameLst>
+                                      </p:cBhvr>
+                                      <p:to>
+                                        <p:strVal val="visible"/>
+                                      </p:to>
+                                    </p:set>
+                                  </p:childTnLst>
+                                </p:cTn>
+                              </p:par>
+                            </p:childTnLst>
+                          </p:cTn>
+                        </p:par>
+                      </p:childTnLst>
+                    </p:cTn>
+                  </p:par>
+                  <p:par>
+                    <p:cTn id="15" fill="hold">
+                      <p:stCondLst>
+                        <p:cond delay="indefinite"/>
+                      </p:stCondLst>
+                      <p:childTnLst>
+                        <p:par>
+                          <p:cTn id="16" fill="hold">
+                            <p:stCondLst>
+                              <p:cond delay="0"/>
+                            </p:stCondLst>
+                            <p:childTnLst>
+                              <p:par>
+                                <p:cTn id="17" presetID="1" presetClass="entr" presetSubtype="0" fill="hold" nodeType="clickEffect">
+                                  <p:stCondLst>
+                                    <p:cond delay="0"/>
+                                  </p:stCondLst>
+                                  <p:childTnLst>
+                                    <p:set>
+                                      <p:cBhvr>
+                                        <p:cTn id="18" dur="1" fill="hold">
+                                          <p:stCondLst>
+                                            <p:cond delay="0"/>
+                                          </p:stCondLst>
+                                        </p:cTn>
+                                        <p:tgtEl>
+                                          <p:spTgt spid="3">
+                                            <p:txEl>
+                                              <p:pRg st="4" end="4"/>
+                                            </p:txEl>
+                                          </p:spTgt>
+                                        </p:tgtEl>
+                                        <p:attrNameLst>
+                                          <p:attrName>style.visibility</p:attrName>
+                                        </p:attrNameLst>
+                                      </p:cBhvr>
+                                      <p:to>
+                                        <p:strVal val="visible"/>
+                                      </p:to>
+                                    </p:set>
+                                  </p:childTnLst>
+                                </p:cTn>
+                              </p:par>
+                            </p:childTnLst>
+                          </p:cTn>
+                        </p:par>
+                      </p:childTnLst>
+                    </p:cTn>
+                  </p:par>
+                </p:childTnLst>
+              </p:cTn>
+              <p:prevCondLst>
+                <p:cond evt="onPrev" delay="0">
+                  <p:tgtEl>
+                    <p:sldTgt/>
+                  </p:tgtEl>
+                </p:cond>
+              </p:prevCondLst>
+              <p:nextCondLst>
+                <p:cond evt="onNext" delay="0">
+                  <p:tgtEl>
+                    <p:sldTgt/>
+                  </p:tgtEl>
+                </p:cond>
+              </p:nextCondLst>
+            </p:seq>
+          </p:childTnLst>
+        </p:cTn>
+      </p:par>
+    </p:tnLst>
+  </p:timing>
 </p:sld>
 </file>
 
@@ -4740,9 +5529,16 @@
             <p:ph idx="1"/>
           </p:nvPr>
         </p:nvSpPr>
-        <p:spPr/>
-        <p:txBody>
-          <a:bodyPr/>
+        <p:spPr>
+          <a:xfrm>
+            <a:off x="838200" y="1825625"/>
+            <a:ext cx="10515600" cy="4667250"/>
+          </a:xfrm>
+        </p:spPr>
+        <p:txBody>
+          <a:bodyPr>
+            <a:normAutofit/>
+          </a:bodyPr>
           <a:lstStyle/>
           <a:p>
             <a:r>
@@ -4799,7 +5595,7 @@
           <a:p>
             <a:r>
               <a:rPr lang="en-US" dirty="0"/>
-              <a:t>Note that the website is a work in progress! It’ll have the assignments posted to it as they are released.</a:t>
+              <a:t>Note that the website is updated frequently! It’ll have the assignments posted to it as they are released, along with the lecture slides.</a:t>
             </a:r>
           </a:p>
           <a:p>
@@ -5095,6 +5891,379 @@
   <p:clrMapOvr>
     <a:masterClrMapping/>
   </p:clrMapOvr>
+  <p:timing>
+    <p:tnLst>
+      <p:par>
+        <p:cTn id="1" dur="indefinite" restart="never" nodeType="tmRoot">
+          <p:childTnLst>
+            <p:seq concurrent="1" nextAc="seek">
+              <p:cTn id="2" dur="indefinite" nodeType="mainSeq">
+                <p:childTnLst>
+                  <p:par>
+                    <p:cTn id="3" fill="hold">
+                      <p:stCondLst>
+                        <p:cond delay="indefinite"/>
+                      </p:stCondLst>
+                      <p:childTnLst>
+                        <p:par>
+                          <p:cTn id="4" fill="hold">
+                            <p:stCondLst>
+                              <p:cond delay="0"/>
+                            </p:stCondLst>
+                            <p:childTnLst>
+                              <p:par>
+                                <p:cTn id="5" presetID="1" presetClass="entr" presetSubtype="0" fill="hold" nodeType="clickEffect">
+                                  <p:stCondLst>
+                                    <p:cond delay="0"/>
+                                  </p:stCondLst>
+                                  <p:childTnLst>
+                                    <p:set>
+                                      <p:cBhvr>
+                                        <p:cTn id="6" dur="1" fill="hold">
+                                          <p:stCondLst>
+                                            <p:cond delay="0"/>
+                                          </p:stCondLst>
+                                        </p:cTn>
+                                        <p:tgtEl>
+                                          <p:spTgt spid="3">
+                                            <p:txEl>
+                                              <p:pRg st="0" end="0"/>
+                                            </p:txEl>
+                                          </p:spTgt>
+                                        </p:tgtEl>
+                                        <p:attrNameLst>
+                                          <p:attrName>style.visibility</p:attrName>
+                                        </p:attrNameLst>
+                                      </p:cBhvr>
+                                      <p:to>
+                                        <p:strVal val="visible"/>
+                                      </p:to>
+                                    </p:set>
+                                  </p:childTnLst>
+                                </p:cTn>
+                              </p:par>
+                            </p:childTnLst>
+                          </p:cTn>
+                        </p:par>
+                      </p:childTnLst>
+                    </p:cTn>
+                  </p:par>
+                  <p:par>
+                    <p:cTn id="7" fill="hold">
+                      <p:stCondLst>
+                        <p:cond delay="indefinite"/>
+                      </p:stCondLst>
+                      <p:childTnLst>
+                        <p:par>
+                          <p:cTn id="8" fill="hold">
+                            <p:stCondLst>
+                              <p:cond delay="0"/>
+                            </p:stCondLst>
+                            <p:childTnLst>
+                              <p:par>
+                                <p:cTn id="9" presetID="1" presetClass="entr" presetSubtype="0" fill="hold" nodeType="clickEffect">
+                                  <p:stCondLst>
+                                    <p:cond delay="0"/>
+                                  </p:stCondLst>
+                                  <p:childTnLst>
+                                    <p:set>
+                                      <p:cBhvr>
+                                        <p:cTn id="10" dur="1" fill="hold">
+                                          <p:stCondLst>
+                                            <p:cond delay="0"/>
+                                          </p:stCondLst>
+                                        </p:cTn>
+                                        <p:tgtEl>
+                                          <p:spTgt spid="3">
+                                            <p:txEl>
+                                              <p:pRg st="1" end="1"/>
+                                            </p:txEl>
+                                          </p:spTgt>
+                                        </p:tgtEl>
+                                        <p:attrNameLst>
+                                          <p:attrName>style.visibility</p:attrName>
+                                        </p:attrNameLst>
+                                      </p:cBhvr>
+                                      <p:to>
+                                        <p:strVal val="visible"/>
+                                      </p:to>
+                                    </p:set>
+                                  </p:childTnLst>
+                                </p:cTn>
+                              </p:par>
+                            </p:childTnLst>
+                          </p:cTn>
+                        </p:par>
+                      </p:childTnLst>
+                    </p:cTn>
+                  </p:par>
+                  <p:par>
+                    <p:cTn id="11" fill="hold">
+                      <p:stCondLst>
+                        <p:cond delay="indefinite"/>
+                      </p:stCondLst>
+                      <p:childTnLst>
+                        <p:par>
+                          <p:cTn id="12" fill="hold">
+                            <p:stCondLst>
+                              <p:cond delay="0"/>
+                            </p:stCondLst>
+                            <p:childTnLst>
+                              <p:par>
+                                <p:cTn id="13" presetID="1" presetClass="entr" presetSubtype="0" fill="hold" nodeType="clickEffect">
+                                  <p:stCondLst>
+                                    <p:cond delay="0"/>
+                                  </p:stCondLst>
+                                  <p:childTnLst>
+                                    <p:set>
+                                      <p:cBhvr>
+                                        <p:cTn id="14" dur="1" fill="hold">
+                                          <p:stCondLst>
+                                            <p:cond delay="0"/>
+                                          </p:stCondLst>
+                                        </p:cTn>
+                                        <p:tgtEl>
+                                          <p:spTgt spid="3">
+                                            <p:txEl>
+                                              <p:pRg st="2" end="2"/>
+                                            </p:txEl>
+                                          </p:spTgt>
+                                        </p:tgtEl>
+                                        <p:attrNameLst>
+                                          <p:attrName>style.visibility</p:attrName>
+                                        </p:attrNameLst>
+                                      </p:cBhvr>
+                                      <p:to>
+                                        <p:strVal val="visible"/>
+                                      </p:to>
+                                    </p:set>
+                                  </p:childTnLst>
+                                </p:cTn>
+                              </p:par>
+                            </p:childTnLst>
+                          </p:cTn>
+                        </p:par>
+                      </p:childTnLst>
+                    </p:cTn>
+                  </p:par>
+                  <p:par>
+                    <p:cTn id="15" fill="hold">
+                      <p:stCondLst>
+                        <p:cond delay="indefinite"/>
+                      </p:stCondLst>
+                      <p:childTnLst>
+                        <p:par>
+                          <p:cTn id="16" fill="hold">
+                            <p:stCondLst>
+                              <p:cond delay="0"/>
+                            </p:stCondLst>
+                            <p:childTnLst>
+                              <p:par>
+                                <p:cTn id="17" presetID="1" presetClass="entr" presetSubtype="0" fill="hold" nodeType="clickEffect">
+                                  <p:stCondLst>
+                                    <p:cond delay="0"/>
+                                  </p:stCondLst>
+                                  <p:childTnLst>
+                                    <p:set>
+                                      <p:cBhvr>
+                                        <p:cTn id="18" dur="1" fill="hold">
+                                          <p:stCondLst>
+                                            <p:cond delay="0"/>
+                                          </p:stCondLst>
+                                        </p:cTn>
+                                        <p:tgtEl>
+                                          <p:spTgt spid="3">
+                                            <p:txEl>
+                                              <p:pRg st="3" end="3"/>
+                                            </p:txEl>
+                                          </p:spTgt>
+                                        </p:tgtEl>
+                                        <p:attrNameLst>
+                                          <p:attrName>style.visibility</p:attrName>
+                                        </p:attrNameLst>
+                                      </p:cBhvr>
+                                      <p:to>
+                                        <p:strVal val="visible"/>
+                                      </p:to>
+                                    </p:set>
+                                  </p:childTnLst>
+                                </p:cTn>
+                              </p:par>
+                            </p:childTnLst>
+                          </p:cTn>
+                        </p:par>
+                      </p:childTnLst>
+                    </p:cTn>
+                  </p:par>
+                  <p:par>
+                    <p:cTn id="19" fill="hold">
+                      <p:stCondLst>
+                        <p:cond delay="indefinite"/>
+                      </p:stCondLst>
+                      <p:childTnLst>
+                        <p:par>
+                          <p:cTn id="20" fill="hold">
+                            <p:stCondLst>
+                              <p:cond delay="0"/>
+                            </p:stCondLst>
+                            <p:childTnLst>
+                              <p:par>
+                                <p:cTn id="21" presetID="1" presetClass="entr" presetSubtype="0" fill="hold" nodeType="clickEffect">
+                                  <p:stCondLst>
+                                    <p:cond delay="0"/>
+                                  </p:stCondLst>
+                                  <p:childTnLst>
+                                    <p:set>
+                                      <p:cBhvr>
+                                        <p:cTn id="22" dur="1" fill="hold">
+                                          <p:stCondLst>
+                                            <p:cond delay="0"/>
+                                          </p:stCondLst>
+                                        </p:cTn>
+                                        <p:tgtEl>
+                                          <p:spTgt spid="3">
+                                            <p:txEl>
+                                              <p:pRg st="4" end="4"/>
+                                            </p:txEl>
+                                          </p:spTgt>
+                                        </p:tgtEl>
+                                        <p:attrNameLst>
+                                          <p:attrName>style.visibility</p:attrName>
+                                        </p:attrNameLst>
+                                      </p:cBhvr>
+                                      <p:to>
+                                        <p:strVal val="visible"/>
+                                      </p:to>
+                                    </p:set>
+                                  </p:childTnLst>
+                                </p:cTn>
+                              </p:par>
+                            </p:childTnLst>
+                          </p:cTn>
+                        </p:par>
+                      </p:childTnLst>
+                    </p:cTn>
+                  </p:par>
+                  <p:par>
+                    <p:cTn id="23" fill="hold">
+                      <p:stCondLst>
+                        <p:cond delay="indefinite"/>
+                      </p:stCondLst>
+                      <p:childTnLst>
+                        <p:par>
+                          <p:cTn id="24" fill="hold">
+                            <p:stCondLst>
+                              <p:cond delay="0"/>
+                            </p:stCondLst>
+                            <p:childTnLst>
+                              <p:par>
+                                <p:cTn id="25" presetID="1" presetClass="entr" presetSubtype="0" fill="hold" nodeType="clickEffect">
+                                  <p:stCondLst>
+                                    <p:cond delay="0"/>
+                                  </p:stCondLst>
+                                  <p:childTnLst>
+                                    <p:set>
+                                      <p:cBhvr>
+                                        <p:cTn id="26" dur="1" fill="hold">
+                                          <p:stCondLst>
+                                            <p:cond delay="0"/>
+                                          </p:stCondLst>
+                                        </p:cTn>
+                                        <p:tgtEl>
+                                          <p:spTgt spid="3">
+                                            <p:txEl>
+                                              <p:pRg st="5" end="5"/>
+                                            </p:txEl>
+                                          </p:spTgt>
+                                        </p:tgtEl>
+                                        <p:attrNameLst>
+                                          <p:attrName>style.visibility</p:attrName>
+                                        </p:attrNameLst>
+                                      </p:cBhvr>
+                                      <p:to>
+                                        <p:strVal val="visible"/>
+                                      </p:to>
+                                    </p:set>
+                                  </p:childTnLst>
+                                </p:cTn>
+                              </p:par>
+                            </p:childTnLst>
+                          </p:cTn>
+                        </p:par>
+                      </p:childTnLst>
+                    </p:cTn>
+                  </p:par>
+                  <p:par>
+                    <p:cTn id="27" fill="hold">
+                      <p:stCondLst>
+                        <p:cond delay="indefinite"/>
+                      </p:stCondLst>
+                      <p:childTnLst>
+                        <p:par>
+                          <p:cTn id="28" fill="hold">
+                            <p:stCondLst>
+                              <p:cond delay="0"/>
+                            </p:stCondLst>
+                            <p:childTnLst>
+                              <p:par>
+                                <p:cTn id="29" presetID="1" presetClass="entr" presetSubtype="0" fill="hold" nodeType="clickEffect">
+                                  <p:stCondLst>
+                                    <p:cond delay="0"/>
+                                  </p:stCondLst>
+                                  <p:childTnLst>
+                                    <p:set>
+                                      <p:cBhvr>
+                                        <p:cTn id="30" dur="1" fill="hold">
+                                          <p:stCondLst>
+                                            <p:cond delay="0"/>
+                                          </p:stCondLst>
+                                        </p:cTn>
+                                        <p:tgtEl>
+                                          <p:spTgt spid="3">
+                                            <p:txEl>
+                                              <p:pRg st="6" end="6"/>
+                                            </p:txEl>
+                                          </p:spTgt>
+                                        </p:tgtEl>
+                                        <p:attrNameLst>
+                                          <p:attrName>style.visibility</p:attrName>
+                                        </p:attrNameLst>
+                                      </p:cBhvr>
+                                      <p:to>
+                                        <p:strVal val="visible"/>
+                                      </p:to>
+                                    </p:set>
+                                  </p:childTnLst>
+                                </p:cTn>
+                              </p:par>
+                            </p:childTnLst>
+                          </p:cTn>
+                        </p:par>
+                      </p:childTnLst>
+                    </p:cTn>
+                  </p:par>
+                </p:childTnLst>
+              </p:cTn>
+              <p:prevCondLst>
+                <p:cond evt="onPrev" delay="0">
+                  <p:tgtEl>
+                    <p:sldTgt/>
+                  </p:tgtEl>
+                </p:cond>
+              </p:prevCondLst>
+              <p:nextCondLst>
+                <p:cond evt="onNext" delay="0">
+                  <p:tgtEl>
+                    <p:sldTgt/>
+                  </p:tgtEl>
+                </p:cond>
+              </p:nextCondLst>
+            </p:seq>
+          </p:childTnLst>
+        </p:cTn>
+      </p:par>
+    </p:tnLst>
+  </p:timing>
 </p:sld>
 </file>
 
@@ -5225,6 +6394,232 @@
   <p:clrMapOvr>
     <a:masterClrMapping/>
   </p:clrMapOvr>
+  <p:timing>
+    <p:tnLst>
+      <p:par>
+        <p:cTn id="1" dur="indefinite" restart="never" nodeType="tmRoot">
+          <p:childTnLst>
+            <p:seq concurrent="1" nextAc="seek">
+              <p:cTn id="2" dur="indefinite" nodeType="mainSeq">
+                <p:childTnLst>
+                  <p:par>
+                    <p:cTn id="3" fill="hold">
+                      <p:stCondLst>
+                        <p:cond delay="indefinite"/>
+                      </p:stCondLst>
+                      <p:childTnLst>
+                        <p:par>
+                          <p:cTn id="4" fill="hold">
+                            <p:stCondLst>
+                              <p:cond delay="0"/>
+                            </p:stCondLst>
+                            <p:childTnLst>
+                              <p:par>
+                                <p:cTn id="5" presetID="1" presetClass="entr" presetSubtype="0" fill="hold" nodeType="clickEffect">
+                                  <p:stCondLst>
+                                    <p:cond delay="0"/>
+                                  </p:stCondLst>
+                                  <p:childTnLst>
+                                    <p:set>
+                                      <p:cBhvr>
+                                        <p:cTn id="6" dur="1" fill="hold">
+                                          <p:stCondLst>
+                                            <p:cond delay="0"/>
+                                          </p:stCondLst>
+                                        </p:cTn>
+                                        <p:tgtEl>
+                                          <p:spTgt spid="3">
+                                            <p:txEl>
+                                              <p:pRg st="0" end="0"/>
+                                            </p:txEl>
+                                          </p:spTgt>
+                                        </p:tgtEl>
+                                        <p:attrNameLst>
+                                          <p:attrName>style.visibility</p:attrName>
+                                        </p:attrNameLst>
+                                      </p:cBhvr>
+                                      <p:to>
+                                        <p:strVal val="visible"/>
+                                      </p:to>
+                                    </p:set>
+                                  </p:childTnLst>
+                                </p:cTn>
+                              </p:par>
+                            </p:childTnLst>
+                          </p:cTn>
+                        </p:par>
+                      </p:childTnLst>
+                    </p:cTn>
+                  </p:par>
+                  <p:par>
+                    <p:cTn id="7" fill="hold">
+                      <p:stCondLst>
+                        <p:cond delay="indefinite"/>
+                      </p:stCondLst>
+                      <p:childTnLst>
+                        <p:par>
+                          <p:cTn id="8" fill="hold">
+                            <p:stCondLst>
+                              <p:cond delay="0"/>
+                            </p:stCondLst>
+                            <p:childTnLst>
+                              <p:par>
+                                <p:cTn id="9" presetID="1" presetClass="entr" presetSubtype="0" fill="hold" nodeType="clickEffect">
+                                  <p:stCondLst>
+                                    <p:cond delay="0"/>
+                                  </p:stCondLst>
+                                  <p:childTnLst>
+                                    <p:set>
+                                      <p:cBhvr>
+                                        <p:cTn id="10" dur="1" fill="hold">
+                                          <p:stCondLst>
+                                            <p:cond delay="0"/>
+                                          </p:stCondLst>
+                                        </p:cTn>
+                                        <p:tgtEl>
+                                          <p:spTgt spid="3">
+                                            <p:txEl>
+                                              <p:pRg st="1" end="1"/>
+                                            </p:txEl>
+                                          </p:spTgt>
+                                        </p:tgtEl>
+                                        <p:attrNameLst>
+                                          <p:attrName>style.visibility</p:attrName>
+                                        </p:attrNameLst>
+                                      </p:cBhvr>
+                                      <p:to>
+                                        <p:strVal val="visible"/>
+                                      </p:to>
+                                    </p:set>
+                                  </p:childTnLst>
+                                </p:cTn>
+                              </p:par>
+                            </p:childTnLst>
+                          </p:cTn>
+                        </p:par>
+                      </p:childTnLst>
+                    </p:cTn>
+                  </p:par>
+                  <p:par>
+                    <p:cTn id="11" fill="hold">
+                      <p:stCondLst>
+                        <p:cond delay="indefinite"/>
+                      </p:stCondLst>
+                      <p:childTnLst>
+                        <p:par>
+                          <p:cTn id="12" fill="hold">
+                            <p:stCondLst>
+                              <p:cond delay="0"/>
+                            </p:stCondLst>
+                            <p:childTnLst>
+                              <p:par>
+                                <p:cTn id="13" presetID="1" presetClass="entr" presetSubtype="0" fill="hold" nodeType="clickEffect">
+                                  <p:stCondLst>
+                                    <p:cond delay="0"/>
+                                  </p:stCondLst>
+                                  <p:childTnLst>
+                                    <p:set>
+                                      <p:cBhvr>
+                                        <p:cTn id="14" dur="1" fill="hold">
+                                          <p:stCondLst>
+                                            <p:cond delay="0"/>
+                                          </p:stCondLst>
+                                        </p:cTn>
+                                        <p:tgtEl>
+                                          <p:spTgt spid="3">
+                                            <p:txEl>
+                                              <p:pRg st="2" end="2"/>
+                                            </p:txEl>
+                                          </p:spTgt>
+                                        </p:tgtEl>
+                                        <p:attrNameLst>
+                                          <p:attrName>style.visibility</p:attrName>
+                                        </p:attrNameLst>
+                                      </p:cBhvr>
+                                      <p:to>
+                                        <p:strVal val="visible"/>
+                                      </p:to>
+                                    </p:set>
+                                  </p:childTnLst>
+                                </p:cTn>
+                              </p:par>
+                            </p:childTnLst>
+                          </p:cTn>
+                        </p:par>
+                      </p:childTnLst>
+                    </p:cTn>
+                  </p:par>
+                  <p:par>
+                    <p:cTn id="15" fill="hold">
+                      <p:stCondLst>
+                        <p:cond delay="indefinite"/>
+                      </p:stCondLst>
+                      <p:childTnLst>
+                        <p:par>
+                          <p:cTn id="16" fill="hold">
+                            <p:stCondLst>
+                              <p:cond delay="0"/>
+                            </p:stCondLst>
+                            <p:childTnLst>
+                              <p:par>
+                                <p:cTn id="17" presetID="1" presetClass="entr" presetSubtype="0" fill="hold" nodeType="clickEffect">
+                                  <p:stCondLst>
+                                    <p:cond delay="0"/>
+                                  </p:stCondLst>
+                                  <p:childTnLst>
+                                    <p:set>
+                                      <p:cBhvr>
+                                        <p:cTn id="18" dur="1" fill="hold">
+                                          <p:stCondLst>
+                                            <p:cond delay="0"/>
+                                          </p:stCondLst>
+                                        </p:cTn>
+                                        <p:tgtEl>
+                                          <p:spTgt spid="3">
+                                            <p:txEl>
+                                              <p:pRg st="3" end="3"/>
+                                            </p:txEl>
+                                          </p:spTgt>
+                                        </p:tgtEl>
+                                        <p:attrNameLst>
+                                          <p:attrName>style.visibility</p:attrName>
+                                        </p:attrNameLst>
+                                      </p:cBhvr>
+                                      <p:to>
+                                        <p:strVal val="visible"/>
+                                      </p:to>
+                                    </p:set>
+                                  </p:childTnLst>
+                                </p:cTn>
+                              </p:par>
+                            </p:childTnLst>
+                          </p:cTn>
+                        </p:par>
+                      </p:childTnLst>
+                    </p:cTn>
+                  </p:par>
+                </p:childTnLst>
+              </p:cTn>
+              <p:prevCondLst>
+                <p:cond evt="onPrev" delay="0">
+                  <p:tgtEl>
+                    <p:sldTgt/>
+                  </p:tgtEl>
+                </p:cond>
+              </p:prevCondLst>
+              <p:nextCondLst>
+                <p:cond evt="onNext" delay="0">
+                  <p:tgtEl>
+                    <p:sldTgt/>
+                  </p:tgtEl>
+                </p:cond>
+              </p:nextCondLst>
+            </p:seq>
+          </p:childTnLst>
+        </p:cTn>
+      </p:par>
+    </p:tnLst>
+  </p:timing>
 </p:sld>
 </file>
 
@@ -5346,6 +6741,232 @@
   <p:clrMapOvr>
     <a:masterClrMapping/>
   </p:clrMapOvr>
+  <p:timing>
+    <p:tnLst>
+      <p:par>
+        <p:cTn id="1" dur="indefinite" restart="never" nodeType="tmRoot">
+          <p:childTnLst>
+            <p:seq concurrent="1" nextAc="seek">
+              <p:cTn id="2" dur="indefinite" nodeType="mainSeq">
+                <p:childTnLst>
+                  <p:par>
+                    <p:cTn id="3" fill="hold">
+                      <p:stCondLst>
+                        <p:cond delay="indefinite"/>
+                      </p:stCondLst>
+                      <p:childTnLst>
+                        <p:par>
+                          <p:cTn id="4" fill="hold">
+                            <p:stCondLst>
+                              <p:cond delay="0"/>
+                            </p:stCondLst>
+                            <p:childTnLst>
+                              <p:par>
+                                <p:cTn id="5" presetID="1" presetClass="entr" presetSubtype="0" fill="hold" nodeType="clickEffect">
+                                  <p:stCondLst>
+                                    <p:cond delay="0"/>
+                                  </p:stCondLst>
+                                  <p:childTnLst>
+                                    <p:set>
+                                      <p:cBhvr>
+                                        <p:cTn id="6" dur="1" fill="hold">
+                                          <p:stCondLst>
+                                            <p:cond delay="0"/>
+                                          </p:stCondLst>
+                                        </p:cTn>
+                                        <p:tgtEl>
+                                          <p:spTgt spid="3">
+                                            <p:txEl>
+                                              <p:pRg st="0" end="0"/>
+                                            </p:txEl>
+                                          </p:spTgt>
+                                        </p:tgtEl>
+                                        <p:attrNameLst>
+                                          <p:attrName>style.visibility</p:attrName>
+                                        </p:attrNameLst>
+                                      </p:cBhvr>
+                                      <p:to>
+                                        <p:strVal val="visible"/>
+                                      </p:to>
+                                    </p:set>
+                                  </p:childTnLst>
+                                </p:cTn>
+                              </p:par>
+                            </p:childTnLst>
+                          </p:cTn>
+                        </p:par>
+                      </p:childTnLst>
+                    </p:cTn>
+                  </p:par>
+                  <p:par>
+                    <p:cTn id="7" fill="hold">
+                      <p:stCondLst>
+                        <p:cond delay="indefinite"/>
+                      </p:stCondLst>
+                      <p:childTnLst>
+                        <p:par>
+                          <p:cTn id="8" fill="hold">
+                            <p:stCondLst>
+                              <p:cond delay="0"/>
+                            </p:stCondLst>
+                            <p:childTnLst>
+                              <p:par>
+                                <p:cTn id="9" presetID="1" presetClass="entr" presetSubtype="0" fill="hold" nodeType="clickEffect">
+                                  <p:stCondLst>
+                                    <p:cond delay="0"/>
+                                  </p:stCondLst>
+                                  <p:childTnLst>
+                                    <p:set>
+                                      <p:cBhvr>
+                                        <p:cTn id="10" dur="1" fill="hold">
+                                          <p:stCondLst>
+                                            <p:cond delay="0"/>
+                                          </p:stCondLst>
+                                        </p:cTn>
+                                        <p:tgtEl>
+                                          <p:spTgt spid="3">
+                                            <p:txEl>
+                                              <p:pRg st="1" end="1"/>
+                                            </p:txEl>
+                                          </p:spTgt>
+                                        </p:tgtEl>
+                                        <p:attrNameLst>
+                                          <p:attrName>style.visibility</p:attrName>
+                                        </p:attrNameLst>
+                                      </p:cBhvr>
+                                      <p:to>
+                                        <p:strVal val="visible"/>
+                                      </p:to>
+                                    </p:set>
+                                  </p:childTnLst>
+                                </p:cTn>
+                              </p:par>
+                            </p:childTnLst>
+                          </p:cTn>
+                        </p:par>
+                      </p:childTnLst>
+                    </p:cTn>
+                  </p:par>
+                  <p:par>
+                    <p:cTn id="11" fill="hold">
+                      <p:stCondLst>
+                        <p:cond delay="indefinite"/>
+                      </p:stCondLst>
+                      <p:childTnLst>
+                        <p:par>
+                          <p:cTn id="12" fill="hold">
+                            <p:stCondLst>
+                              <p:cond delay="0"/>
+                            </p:stCondLst>
+                            <p:childTnLst>
+                              <p:par>
+                                <p:cTn id="13" presetID="1" presetClass="entr" presetSubtype="0" fill="hold" nodeType="clickEffect">
+                                  <p:stCondLst>
+                                    <p:cond delay="0"/>
+                                  </p:stCondLst>
+                                  <p:childTnLst>
+                                    <p:set>
+                                      <p:cBhvr>
+                                        <p:cTn id="14" dur="1" fill="hold">
+                                          <p:stCondLst>
+                                            <p:cond delay="0"/>
+                                          </p:stCondLst>
+                                        </p:cTn>
+                                        <p:tgtEl>
+                                          <p:spTgt spid="3">
+                                            <p:txEl>
+                                              <p:pRg st="2" end="2"/>
+                                            </p:txEl>
+                                          </p:spTgt>
+                                        </p:tgtEl>
+                                        <p:attrNameLst>
+                                          <p:attrName>style.visibility</p:attrName>
+                                        </p:attrNameLst>
+                                      </p:cBhvr>
+                                      <p:to>
+                                        <p:strVal val="visible"/>
+                                      </p:to>
+                                    </p:set>
+                                  </p:childTnLst>
+                                </p:cTn>
+                              </p:par>
+                            </p:childTnLst>
+                          </p:cTn>
+                        </p:par>
+                      </p:childTnLst>
+                    </p:cTn>
+                  </p:par>
+                  <p:par>
+                    <p:cTn id="15" fill="hold">
+                      <p:stCondLst>
+                        <p:cond delay="indefinite"/>
+                      </p:stCondLst>
+                      <p:childTnLst>
+                        <p:par>
+                          <p:cTn id="16" fill="hold">
+                            <p:stCondLst>
+                              <p:cond delay="0"/>
+                            </p:stCondLst>
+                            <p:childTnLst>
+                              <p:par>
+                                <p:cTn id="17" presetID="1" presetClass="entr" presetSubtype="0" fill="hold" nodeType="clickEffect">
+                                  <p:stCondLst>
+                                    <p:cond delay="0"/>
+                                  </p:stCondLst>
+                                  <p:childTnLst>
+                                    <p:set>
+                                      <p:cBhvr>
+                                        <p:cTn id="18" dur="1" fill="hold">
+                                          <p:stCondLst>
+                                            <p:cond delay="0"/>
+                                          </p:stCondLst>
+                                        </p:cTn>
+                                        <p:tgtEl>
+                                          <p:spTgt spid="3">
+                                            <p:txEl>
+                                              <p:pRg st="3" end="3"/>
+                                            </p:txEl>
+                                          </p:spTgt>
+                                        </p:tgtEl>
+                                        <p:attrNameLst>
+                                          <p:attrName>style.visibility</p:attrName>
+                                        </p:attrNameLst>
+                                      </p:cBhvr>
+                                      <p:to>
+                                        <p:strVal val="visible"/>
+                                      </p:to>
+                                    </p:set>
+                                  </p:childTnLst>
+                                </p:cTn>
+                              </p:par>
+                            </p:childTnLst>
+                          </p:cTn>
+                        </p:par>
+                      </p:childTnLst>
+                    </p:cTn>
+                  </p:par>
+                </p:childTnLst>
+              </p:cTn>
+              <p:prevCondLst>
+                <p:cond evt="onPrev" delay="0">
+                  <p:tgtEl>
+                    <p:sldTgt/>
+                  </p:tgtEl>
+                </p:cond>
+              </p:prevCondLst>
+              <p:nextCondLst>
+                <p:cond evt="onNext" delay="0">
+                  <p:tgtEl>
+                    <p:sldTgt/>
+                  </p:tgtEl>
+                </p:cond>
+              </p:nextCondLst>
+            </p:seq>
+          </p:childTnLst>
+        </p:cTn>
+      </p:par>
+    </p:tnLst>
+  </p:timing>
 </p:sld>
 </file>
 
